--- a/Software Testing/Quizzes/01. Introduction To Software Testing.pptx
+++ b/Software Testing/Quizzes/01. Introduction To Software Testing.pptx
@@ -11,7 +11,7 @@
     <p:handoutMasterId r:id="rId4"/>
   </p:handoutMasterIdLst>
   <p:sldIdLst>
-    <p:sldId id="854" r:id="rId2"/>
+    <p:sldId id="855" r:id="rId2"/>
   </p:sldIdLst>
   <p:sldSz cx="9144000" cy="6858000" type="screen4x3"/>
   <p:notesSz cx="6858000" cy="9144000"/>
@@ -226,7 +226,7 @@
             <a:fld id="{8FCF70C7-1A17-4B8F-8E82-A20E29AAAC58}" type="datetimeFigureOut">
               <a:rPr lang="en-US" smtClean="0"/>
               <a:pPr/>
-              <a:t>2/27/2023</a:t>
+              <a:t>7/15/2026</a:t>
             </a:fld>
             <a:endParaRPr lang="en-US" dirty="0"/>
           </a:p>
@@ -388,7 +388,7 @@
             <a:fld id="{B972150E-24DE-4D23-AF8D-CF01896B0C83}" type="datetimeFigureOut">
               <a:rPr lang="en-US" smtClean="0"/>
               <a:pPr/>
-              <a:t>2/27/2023</a:t>
+              <a:t>7/15/2026</a:t>
             </a:fld>
             <a:endParaRPr lang="en-US" dirty="0"/>
           </a:p>
@@ -845,7 +845,7 @@
               <a:pPr>
                 <a:defRPr/>
               </a:pPr>
-              <a:t>2/27/2023</a:t>
+              <a:t>7/15/2026</a:t>
             </a:fld>
             <a:endParaRPr lang="en-US" dirty="0"/>
           </a:p>
@@ -1037,7 +1037,7 @@
               <a:pPr>
                 <a:defRPr/>
               </a:pPr>
-              <a:t>2/27/2023</a:t>
+              <a:t>7/15/2026</a:t>
             </a:fld>
             <a:endParaRPr lang="en-US" dirty="0"/>
           </a:p>
@@ -1239,7 +1239,7 @@
               <a:pPr>
                 <a:defRPr/>
               </a:pPr>
-              <a:t>2/27/2023</a:t>
+              <a:t>7/15/2026</a:t>
             </a:fld>
             <a:endParaRPr lang="en-US" dirty="0"/>
           </a:p>
@@ -1431,7 +1431,7 @@
               <a:pPr>
                 <a:defRPr/>
               </a:pPr>
-              <a:t>2/27/2023</a:t>
+              <a:t>7/15/2026</a:t>
             </a:fld>
             <a:endParaRPr lang="en-US" dirty="0"/>
           </a:p>
@@ -1699,7 +1699,7 @@
               <a:pPr>
                 <a:defRPr/>
               </a:pPr>
-              <a:t>2/27/2023</a:t>
+              <a:t>7/15/2026</a:t>
             </a:fld>
             <a:endParaRPr lang="en-US" dirty="0"/>
           </a:p>
@@ -2009,7 +2009,7 @@
               <a:pPr>
                 <a:defRPr/>
               </a:pPr>
-              <a:t>2/27/2023</a:t>
+              <a:t>7/15/2026</a:t>
             </a:fld>
             <a:endParaRPr lang="en-US" dirty="0"/>
           </a:p>
@@ -2453,7 +2453,7 @@
               <a:pPr>
                 <a:defRPr/>
               </a:pPr>
-              <a:t>2/27/2023</a:t>
+              <a:t>7/15/2026</a:t>
             </a:fld>
             <a:endParaRPr lang="en-US" dirty="0"/>
           </a:p>
@@ -2593,7 +2593,7 @@
               <a:pPr>
                 <a:defRPr/>
               </a:pPr>
-              <a:t>2/27/2023</a:t>
+              <a:t>7/15/2026</a:t>
             </a:fld>
             <a:endParaRPr lang="en-US" dirty="0"/>
           </a:p>
@@ -2710,7 +2710,7 @@
               <a:pPr>
                 <a:defRPr/>
               </a:pPr>
-              <a:t>2/27/2023</a:t>
+              <a:t>7/15/2026</a:t>
             </a:fld>
             <a:endParaRPr lang="en-US" dirty="0"/>
           </a:p>
@@ -3009,7 +3009,7 @@
               <a:pPr>
                 <a:defRPr/>
               </a:pPr>
-              <a:t>2/27/2023</a:t>
+              <a:t>7/15/2026</a:t>
             </a:fld>
             <a:endParaRPr lang="en-US" dirty="0"/>
           </a:p>
@@ -3287,7 +3287,7 @@
               <a:pPr>
                 <a:defRPr/>
               </a:pPr>
-              <a:t>2/27/2023</a:t>
+              <a:t>7/15/2026</a:t>
             </a:fld>
             <a:endParaRPr lang="en-US" dirty="0"/>
           </a:p>
@@ -3535,7 +3535,7 @@
               <a:pPr>
                 <a:defRPr/>
               </a:pPr>
-              <a:t>2/27/2023</a:t>
+              <a:t>7/15/2026</a:t>
             </a:fld>
             <a:endParaRPr lang="en-US" dirty="0"/>
           </a:p>
@@ -4059,14 +4059,10 @@
           <a:lstStyle/>
           <a:p>
             <a:r>
-              <a:rPr lang="en-US" sz="4000" dirty="0" smtClean="0"/>
-              <a:t>Introduction to Software </a:t>
-            </a:r>
-            <a:r>
-              <a:rPr lang="en-US" sz="4000" dirty="0" smtClean="0"/>
-              <a:t>Testing Quiz</a:t>
-            </a:r>
-            <a:endParaRPr lang="en-US" sz="4000" dirty="0"/>
+              <a:rPr lang="en-US" dirty="0" smtClean="0"/>
+              <a:t>Introduction to Software Testing</a:t>
+            </a:r>
+            <a:endParaRPr lang="en-US" dirty="0"/>
           </a:p>
         </p:txBody>
       </p:sp>
@@ -4080,12 +4076,7 @@
             <p:ph idx="1"/>
           </p:nvPr>
         </p:nvSpPr>
-        <p:spPr>
-          <a:xfrm>
-            <a:off x="457200" y="1600200"/>
-            <a:ext cx="8229600" cy="2133599"/>
-          </a:xfrm>
-        </p:spPr>
+        <p:spPr/>
         <p:txBody>
           <a:bodyPr/>
           <a:lstStyle/>
@@ -4101,11 +4092,14 @@
           <a:p>
             <a:endParaRPr lang="en-US" dirty="0" smtClean="0"/>
           </a:p>
+          <a:p>
+            <a:endParaRPr lang="en-US" dirty="0"/>
+          </a:p>
         </p:txBody>
       </p:sp>
       <p:pic>
         <p:nvPicPr>
-          <p:cNvPr id="1026" name="Picture 2" descr="Related image"/>
+          <p:cNvPr id="4" name="Picture 2"/>
           <p:cNvPicPr>
             <a:picLocks noChangeAspect="1" noChangeArrowheads="1"/>
           </p:cNvPicPr>
@@ -4120,59 +4114,7 @@
         </p:blipFill>
         <p:spPr bwMode="auto">
           <a:xfrm>
-            <a:off x="0" y="2743200"/>
-            <a:ext cx="3810000" cy="2543175"/>
-          </a:xfrm>
-          <a:prstGeom prst="rect">
-            <a:avLst/>
-          </a:prstGeom>
-          <a:noFill/>
-        </p:spPr>
-      </p:pic>
-      <p:pic>
-        <p:nvPicPr>
-          <p:cNvPr id="1030" name="Picture 6" descr="Related image"/>
-          <p:cNvPicPr>
-            <a:picLocks noChangeAspect="1" noChangeArrowheads="1"/>
-          </p:cNvPicPr>
-          <p:nvPr/>
-        </p:nvPicPr>
-        <p:blipFill>
-          <a:blip r:embed="rId4" cstate="print"/>
-          <a:srcRect/>
-          <a:stretch>
-            <a:fillRect/>
-          </a:stretch>
-        </p:blipFill>
-        <p:spPr bwMode="auto">
-          <a:xfrm>
-            <a:off x="3200400" y="2819400"/>
-            <a:ext cx="2381250" cy="2381250"/>
-          </a:xfrm>
-          <a:prstGeom prst="rect">
-            <a:avLst/>
-          </a:prstGeom>
-          <a:noFill/>
-        </p:spPr>
-      </p:pic>
-      <p:pic>
-        <p:nvPicPr>
-          <p:cNvPr id="4" name="Picture 2"/>
-          <p:cNvPicPr>
-            <a:picLocks noChangeAspect="1" noChangeArrowheads="1"/>
-          </p:cNvPicPr>
-          <p:nvPr/>
-        </p:nvPicPr>
-        <p:blipFill>
-          <a:blip r:embed="rId5" cstate="print"/>
-          <a:srcRect/>
-          <a:stretch>
-            <a:fillRect/>
-          </a:stretch>
-        </p:blipFill>
-        <p:spPr bwMode="auto">
-          <a:xfrm>
-            <a:off x="5810250" y="2305050"/>
+            <a:off x="5029200" y="2686050"/>
             <a:ext cx="2952750" cy="2952750"/>
           </a:xfrm>
           <a:prstGeom prst="rect">
